--- a/steelhead_action_5.pptx
+++ b/steelhead_action_5.pptx
@@ -120,7 +120,41 @@
       </a:defRPr>
     </a:lvl9pPr>
   </p:defaultTextStyle>
+  <p:extLst>
+    <p:ext uri="{EFAFB233-063F-42B5-8137-9DF3F51BA10A}">
+      <p15:sldGuideLst xmlns:p15="http://schemas.microsoft.com/office/powerpoint/2012/main"/>
+    </p:ext>
+  </p:extLst>
 </p:presentation>
+</file>
+
+<file path=ppt/changesInfos/changesInfo1.xml><?xml version="1.0" encoding="utf-8"?>
+<pc:chgInfo xmlns:a="http://schemas.openxmlformats.org/drawingml/2006/main" xmlns:r="http://schemas.openxmlformats.org/officeDocument/2006/relationships" xmlns:ac="http://schemas.microsoft.com/office/drawing/2013/main/command" xmlns:pc="http://schemas.microsoft.com/office/powerpoint/2013/main/command">
+  <pc:docChgLst>
+    <pc:chgData name="Ehlo, Chase A" userId="a6660707-78aa-482c-b647-234fbd25e654" providerId="ADAL" clId="{F1E33E7B-DEAB-4E28-B414-E3994BEC1D97}"/>
+    <pc:docChg chg="undo custSel modSld">
+      <pc:chgData name="Ehlo, Chase A" userId="a6660707-78aa-482c-b647-234fbd25e654" providerId="ADAL" clId="{F1E33E7B-DEAB-4E28-B414-E3994BEC1D97}" dt="2026-01-07T16:52:27.181" v="76" actId="20577"/>
+      <pc:docMkLst>
+        <pc:docMk/>
+      </pc:docMkLst>
+      <pc:sldChg chg="modSp mod">
+        <pc:chgData name="Ehlo, Chase A" userId="a6660707-78aa-482c-b647-234fbd25e654" providerId="ADAL" clId="{F1E33E7B-DEAB-4E28-B414-E3994BEC1D97}" dt="2026-01-07T16:52:27.181" v="76" actId="20577"/>
+        <pc:sldMkLst>
+          <pc:docMk/>
+          <pc:sldMk cId="1350432390" sldId="260"/>
+        </pc:sldMkLst>
+        <pc:graphicFrameChg chg="modGraphic">
+          <ac:chgData name="Ehlo, Chase A" userId="a6660707-78aa-482c-b647-234fbd25e654" providerId="ADAL" clId="{F1E33E7B-DEAB-4E28-B414-E3994BEC1D97}" dt="2026-01-07T16:52:27.181" v="76" actId="20577"/>
+          <ac:graphicFrameMkLst>
+            <pc:docMk/>
+            <pc:sldMk cId="1350432390" sldId="260"/>
+            <ac:graphicFrameMk id="4" creationId="{99AFEFF0-520B-96DE-B961-CC3551DE20D4}"/>
+          </ac:graphicFrameMkLst>
+        </pc:graphicFrameChg>
+      </pc:sldChg>
+    </pc:docChg>
+  </pc:docChgLst>
+</pc:chgInfo>
 </file>
 
 <file path=ppt/diagrams/colors1.xml><?xml version="1.0" encoding="utf-8"?>
@@ -20833,7 +20867,7 @@
           <a:p>
             <a:fld id="{82F0E11E-625D-4C64-A767-6BE778B15188}" type="datetimeFigureOut">
               <a:rPr lang="en-US" smtClean="0"/>
-              <a:t>12/15/2025</a:t>
+              <a:t>1/7/2026</a:t>
             </a:fld>
             <a:endParaRPr lang="en-US"/>
           </a:p>
@@ -21331,7 +21365,7 @@
           <a:p>
             <a:fld id="{0577A384-457F-4EA2-AD36-93B5D92BCEF6}" type="datetimeFigureOut">
               <a:rPr lang="en-US" smtClean="0"/>
-              <a:t>12/15/2025</a:t>
+              <a:t>1/7/2026</a:t>
             </a:fld>
             <a:endParaRPr lang="en-US"/>
           </a:p>
@@ -21529,7 +21563,7 @@
           <a:p>
             <a:fld id="{0577A384-457F-4EA2-AD36-93B5D92BCEF6}" type="datetimeFigureOut">
               <a:rPr lang="en-US" smtClean="0"/>
-              <a:t>12/15/2025</a:t>
+              <a:t>1/7/2026</a:t>
             </a:fld>
             <a:endParaRPr lang="en-US"/>
           </a:p>
@@ -21737,7 +21771,7 @@
           <a:p>
             <a:fld id="{0577A384-457F-4EA2-AD36-93B5D92BCEF6}" type="datetimeFigureOut">
               <a:rPr lang="en-US" smtClean="0"/>
-              <a:t>12/15/2025</a:t>
+              <a:t>1/7/2026</a:t>
             </a:fld>
             <a:endParaRPr lang="en-US"/>
           </a:p>
@@ -21935,7 +21969,7 @@
           <a:p>
             <a:fld id="{0577A384-457F-4EA2-AD36-93B5D92BCEF6}" type="datetimeFigureOut">
               <a:rPr lang="en-US" smtClean="0"/>
-              <a:t>12/15/2025</a:t>
+              <a:t>1/7/2026</a:t>
             </a:fld>
             <a:endParaRPr lang="en-US"/>
           </a:p>
@@ -22210,7 +22244,7 @@
           <a:p>
             <a:fld id="{0577A384-457F-4EA2-AD36-93B5D92BCEF6}" type="datetimeFigureOut">
               <a:rPr lang="en-US" smtClean="0"/>
-              <a:t>12/15/2025</a:t>
+              <a:t>1/7/2026</a:t>
             </a:fld>
             <a:endParaRPr lang="en-US"/>
           </a:p>
@@ -22475,7 +22509,7 @@
           <a:p>
             <a:fld id="{0577A384-457F-4EA2-AD36-93B5D92BCEF6}" type="datetimeFigureOut">
               <a:rPr lang="en-US" smtClean="0"/>
-              <a:t>12/15/2025</a:t>
+              <a:t>1/7/2026</a:t>
             </a:fld>
             <a:endParaRPr lang="en-US"/>
           </a:p>
@@ -22887,7 +22921,7 @@
           <a:p>
             <a:fld id="{0577A384-457F-4EA2-AD36-93B5D92BCEF6}" type="datetimeFigureOut">
               <a:rPr lang="en-US" smtClean="0"/>
-              <a:t>12/15/2025</a:t>
+              <a:t>1/7/2026</a:t>
             </a:fld>
             <a:endParaRPr lang="en-US"/>
           </a:p>
@@ -23028,7 +23062,7 @@
           <a:p>
             <a:fld id="{0577A384-457F-4EA2-AD36-93B5D92BCEF6}" type="datetimeFigureOut">
               <a:rPr lang="en-US" smtClean="0"/>
-              <a:t>12/15/2025</a:t>
+              <a:t>1/7/2026</a:t>
             </a:fld>
             <a:endParaRPr lang="en-US"/>
           </a:p>
@@ -23141,7 +23175,7 @@
           <a:p>
             <a:fld id="{0577A384-457F-4EA2-AD36-93B5D92BCEF6}" type="datetimeFigureOut">
               <a:rPr lang="en-US" smtClean="0"/>
-              <a:t>12/15/2025</a:t>
+              <a:t>1/7/2026</a:t>
             </a:fld>
             <a:endParaRPr lang="en-US"/>
           </a:p>
@@ -23452,7 +23486,7 @@
           <a:p>
             <a:fld id="{0577A384-457F-4EA2-AD36-93B5D92BCEF6}" type="datetimeFigureOut">
               <a:rPr lang="en-US" smtClean="0"/>
-              <a:t>12/15/2025</a:t>
+              <a:t>1/7/2026</a:t>
             </a:fld>
             <a:endParaRPr lang="en-US"/>
           </a:p>
@@ -23740,7 +23774,7 @@
           <a:p>
             <a:fld id="{0577A384-457F-4EA2-AD36-93B5D92BCEF6}" type="datetimeFigureOut">
               <a:rPr lang="en-US" smtClean="0"/>
-              <a:t>12/15/2025</a:t>
+              <a:t>1/7/2026</a:t>
             </a:fld>
             <a:endParaRPr lang="en-US"/>
           </a:p>
@@ -23981,7 +24015,7 @@
           <a:p>
             <a:fld id="{0577A384-457F-4EA2-AD36-93B5D92BCEF6}" type="datetimeFigureOut">
               <a:rPr lang="en-US" smtClean="0"/>
-              <a:t>12/15/2025</a:t>
+              <a:t>1/7/2026</a:t>
             </a:fld>
             <a:endParaRPr lang="en-US"/>
           </a:p>
@@ -25883,7 +25917,7 @@
             <p:ph idx="1"/>
             <p:extLst>
               <p:ext uri="{D42A27DB-BD31-4B8C-83A1-F6EECF244321}">
-                <p14:modId xmlns:p14="http://schemas.microsoft.com/office/powerpoint/2010/main" val="3195745043"/>
+                <p14:modId xmlns:p14="http://schemas.microsoft.com/office/powerpoint/2010/main" val="3702897491"/>
               </p:ext>
             </p:extLst>
           </p:nvPr>
@@ -26132,7 +26166,7 @@
                         <a:rPr lang="en-US" sz="1800" b="0" dirty="0">
                           <a:effectLst/>
                         </a:rPr>
-                        <a:t>21% </a:t>
+                        <a:t>0.21 </a:t>
                       </a:r>
                       <a:endParaRPr lang="en-US" sz="3200" b="0" i="0" dirty="0">
                         <a:effectLst/>
@@ -26153,12 +26187,12 @@
                         <a:buNone/>
                       </a:pPr>
                       <a:r>
-                        <a:rPr lang="en-US" sz="1800" b="0">
+                        <a:rPr lang="en-US" sz="1800" b="0" dirty="0">
                           <a:effectLst/>
                         </a:rPr>
-                        <a:t>9% </a:t>
+                        <a:t>0.9</a:t>
                       </a:r>
-                      <a:endParaRPr lang="en-US" sz="3200" b="0" i="0">
+                      <a:endParaRPr lang="en-US" sz="3200" b="0" i="0" dirty="0">
                         <a:effectLst/>
                       </a:endParaRPr>
                     </a:p>
@@ -26177,12 +26211,12 @@
                         <a:buNone/>
                       </a:pPr>
                       <a:r>
-                        <a:rPr lang="en-US" sz="1800" b="0">
+                        <a:rPr lang="en-US" sz="1800" b="0" dirty="0">
                           <a:effectLst/>
                         </a:rPr>
-                        <a:t>62% </a:t>
+                        <a:t>0.62 </a:t>
                       </a:r>
-                      <a:endParaRPr lang="en-US" sz="3200" b="0" i="0">
+                      <a:endParaRPr lang="en-US" sz="3200" b="0" i="0" dirty="0">
                         <a:effectLst/>
                       </a:endParaRPr>
                     </a:p>
@@ -26201,12 +26235,12 @@
                         <a:buNone/>
                       </a:pPr>
                       <a:r>
-                        <a:rPr lang="en-US" sz="1800" b="0">
+                        <a:rPr lang="en-US" sz="1800" b="0" dirty="0">
                           <a:effectLst/>
                         </a:rPr>
-                        <a:t>25% </a:t>
+                        <a:t>0.25 </a:t>
                       </a:r>
-                      <a:endParaRPr lang="en-US" sz="3200" b="0" i="0">
+                      <a:endParaRPr lang="en-US" sz="3200" b="0" i="0" dirty="0">
                         <a:effectLst/>
                       </a:endParaRPr>
                     </a:p>
@@ -26259,7 +26293,7 @@
                         <a:rPr lang="en-US" sz="1800" b="0" dirty="0">
                           <a:effectLst/>
                         </a:rPr>
-                        <a:t>27% </a:t>
+                        <a:t>0.27 </a:t>
                       </a:r>
                       <a:endParaRPr lang="en-US" sz="3200" b="0" i="0" dirty="0">
                         <a:effectLst/>
@@ -26280,12 +26314,12 @@
                         <a:buNone/>
                       </a:pPr>
                       <a:r>
-                        <a:rPr lang="en-US" sz="1800" b="0">
+                        <a:rPr lang="en-US" sz="1800" b="0" dirty="0">
                           <a:effectLst/>
                         </a:rPr>
-                        <a:t>18% </a:t>
+                        <a:t>0.18</a:t>
                       </a:r>
-                      <a:endParaRPr lang="en-US" sz="3200" b="0" i="0">
+                      <a:endParaRPr lang="en-US" sz="3200" b="0" i="0" dirty="0">
                         <a:effectLst/>
                       </a:endParaRPr>
                     </a:p>
@@ -26304,12 +26338,12 @@
                         <a:buNone/>
                       </a:pPr>
                       <a:r>
-                        <a:rPr lang="en-US" sz="1800" b="0">
+                        <a:rPr lang="en-US" sz="1800" b="0" dirty="0">
                           <a:effectLst/>
                         </a:rPr>
-                        <a:t>67% </a:t>
+                        <a:t>0.67</a:t>
                       </a:r>
-                      <a:endParaRPr lang="en-US" sz="3200" b="0" i="0">
+                      <a:endParaRPr lang="en-US" sz="3200" b="0" i="0" dirty="0">
                         <a:effectLst/>
                       </a:endParaRPr>
                     </a:p>
@@ -26328,12 +26362,12 @@
                         <a:buNone/>
                       </a:pPr>
                       <a:r>
-                        <a:rPr lang="en-US" sz="1800" b="0">
+                        <a:rPr lang="en-US" sz="1800" b="0" dirty="0">
                           <a:effectLst/>
                         </a:rPr>
-                        <a:t>27% </a:t>
+                        <a:t>0.27 </a:t>
                       </a:r>
-                      <a:endParaRPr lang="en-US" sz="3200" b="0" i="0">
+                      <a:endParaRPr lang="en-US" sz="3200" b="0" i="0" dirty="0">
                         <a:effectLst/>
                       </a:endParaRPr>
                     </a:p>
@@ -26386,7 +26420,7 @@
                         <a:rPr lang="en-US" sz="1800" b="0" dirty="0">
                           <a:effectLst/>
                         </a:rPr>
-                        <a:t>32% </a:t>
+                        <a:t>0.32</a:t>
                       </a:r>
                       <a:endParaRPr lang="en-US" sz="3200" b="0" i="0" dirty="0">
                         <a:effectLst/>
@@ -26407,12 +26441,12 @@
                         <a:buNone/>
                       </a:pPr>
                       <a:r>
-                        <a:rPr lang="en-US" sz="1800" b="0">
+                        <a:rPr lang="en-US" sz="1800" b="0" dirty="0">
                           <a:effectLst/>
                         </a:rPr>
-                        <a:t>27% </a:t>
+                        <a:t>0.27</a:t>
                       </a:r>
-                      <a:endParaRPr lang="en-US" sz="3200" b="0" i="0">
+                      <a:endParaRPr lang="en-US" sz="3200" b="0" i="0" dirty="0">
                         <a:effectLst/>
                       </a:endParaRPr>
                     </a:p>
@@ -26431,12 +26465,12 @@
                         <a:buNone/>
                       </a:pPr>
                       <a:r>
-                        <a:rPr lang="en-US" sz="1800" b="0">
+                        <a:rPr lang="en-US" sz="1800" b="0" dirty="0">
                           <a:effectLst/>
                         </a:rPr>
-                        <a:t>72% </a:t>
+                        <a:t>0.72</a:t>
                       </a:r>
-                      <a:endParaRPr lang="en-US" sz="3200" b="0" i="0">
+                      <a:endParaRPr lang="en-US" sz="3200" b="0" i="0" dirty="0">
                         <a:effectLst/>
                       </a:endParaRPr>
                     </a:p>
@@ -26455,12 +26489,12 @@
                         <a:buNone/>
                       </a:pPr>
                       <a:r>
-                        <a:rPr lang="en-US" sz="1800" b="0">
+                        <a:rPr lang="en-US" sz="1800" b="0" dirty="0">
                           <a:effectLst/>
                         </a:rPr>
-                        <a:t>29% </a:t>
+                        <a:t>0.29 </a:t>
                       </a:r>
-                      <a:endParaRPr lang="en-US" sz="3200" b="0" i="0">
+                      <a:endParaRPr lang="en-US" sz="3200" b="0" i="0" dirty="0">
                         <a:effectLst/>
                       </a:endParaRPr>
                     </a:p>
@@ -26513,7 +26547,7 @@
                         <a:rPr lang="en-US" sz="1800" b="0" dirty="0">
                           <a:effectLst/>
                         </a:rPr>
-                        <a:t>38% </a:t>
+                        <a:t>0.38</a:t>
                       </a:r>
                       <a:endParaRPr lang="en-US" sz="3200" b="0" i="0" dirty="0">
                         <a:effectLst/>
@@ -26534,12 +26568,12 @@
                         <a:buNone/>
                       </a:pPr>
                       <a:r>
-                        <a:rPr lang="en-US" sz="1800" b="0">
+                        <a:rPr lang="en-US" sz="1800" b="0" dirty="0">
                           <a:effectLst/>
                         </a:rPr>
-                        <a:t>36% </a:t>
+                        <a:t>0.36 </a:t>
                       </a:r>
-                      <a:endParaRPr lang="en-US" sz="3200" b="0" i="0">
+                      <a:endParaRPr lang="en-US" sz="3200" b="0" i="0" dirty="0">
                         <a:effectLst/>
                       </a:endParaRPr>
                     </a:p>
@@ -26558,12 +26592,12 @@
                         <a:buNone/>
                       </a:pPr>
                       <a:r>
-                        <a:rPr lang="en-US" sz="1800" b="0">
+                        <a:rPr lang="en-US" sz="1800" b="0" dirty="0">
                           <a:effectLst/>
                         </a:rPr>
-                        <a:t>78% </a:t>
+                        <a:t>0.78 </a:t>
                       </a:r>
-                      <a:endParaRPr lang="en-US" sz="3200" b="0" i="0">
+                      <a:endParaRPr lang="en-US" sz="3200" b="0" i="0" dirty="0">
                         <a:effectLst/>
                       </a:endParaRPr>
                     </a:p>
@@ -26582,12 +26616,12 @@
                         <a:buNone/>
                       </a:pPr>
                       <a:r>
-                        <a:rPr lang="en-US" sz="1800" b="0">
+                        <a:rPr lang="en-US" sz="1800" b="0" dirty="0">
                           <a:effectLst/>
                         </a:rPr>
-                        <a:t>31% </a:t>
+                        <a:t>0.31 </a:t>
                       </a:r>
-                      <a:endParaRPr lang="en-US" sz="3200" b="0" i="0">
+                      <a:endParaRPr lang="en-US" sz="3200" b="0" i="0" dirty="0">
                         <a:effectLst/>
                       </a:endParaRPr>
                     </a:p>
@@ -26640,7 +26674,55 @@
                         <a:rPr lang="en-US" sz="1800" b="0" dirty="0">
                           <a:effectLst/>
                         </a:rPr>
-                        <a:t>43% </a:t>
+                        <a:t>0.43</a:t>
+                      </a:r>
+                      <a:endParaRPr lang="en-US" sz="3200" b="0" i="0" dirty="0">
+                        <a:effectLst/>
+                      </a:endParaRPr>
+                    </a:p>
+                  </a:txBody>
+                  <a:tcPr anchor="ctr"/>
+                </a:tc>
+                <a:tc>
+                  <a:txBody>
+                    <a:bodyPr/>
+                    <a:lstStyle/>
+                    <a:p>
+                      <a:pPr algn="ctr" rtl="0" fontAlgn="base">
+                        <a:lnSpc>
+                          <a:spcPts val="1376"/>
+                        </a:lnSpc>
+                        <a:buNone/>
+                      </a:pPr>
+                      <a:r>
+                        <a:rPr lang="en-US" sz="1800" b="0" dirty="0">
+                          <a:effectLst/>
+                        </a:rPr>
+                        <a:t>0.45</a:t>
+                      </a:r>
+                      <a:endParaRPr lang="en-US" sz="3200" b="0" i="0" dirty="0">
+                        <a:effectLst/>
+                      </a:endParaRPr>
+                    </a:p>
+                  </a:txBody>
+                  <a:tcPr anchor="ctr"/>
+                </a:tc>
+                <a:tc>
+                  <a:txBody>
+                    <a:bodyPr/>
+                    <a:lstStyle/>
+                    <a:p>
+                      <a:pPr algn="ctr" rtl="0" fontAlgn="base">
+                        <a:lnSpc>
+                          <a:spcPts val="1376"/>
+                        </a:lnSpc>
+                        <a:buNone/>
+                      </a:pPr>
+                      <a:r>
+                        <a:rPr lang="en-US" sz="1800" b="0" dirty="0">
+                          <a:effectLst/>
+                        </a:rPr>
+                        <a:t>0.83</a:t>
                       </a:r>
                       <a:endParaRPr lang="en-US" sz="3200" b="0" i="0" dirty="0">
                         <a:effectLst/>
@@ -26664,55 +26746,7 @@
                         <a:rPr lang="en-US" sz="1800" b="0">
                           <a:effectLst/>
                         </a:rPr>
-                        <a:t>45% </a:t>
-                      </a:r>
-                      <a:endParaRPr lang="en-US" sz="3200" b="0" i="0">
-                        <a:effectLst/>
-                      </a:endParaRPr>
-                    </a:p>
-                  </a:txBody>
-                  <a:tcPr anchor="ctr"/>
-                </a:tc>
-                <a:tc>
-                  <a:txBody>
-                    <a:bodyPr/>
-                    <a:lstStyle/>
-                    <a:p>
-                      <a:pPr algn="ctr" rtl="0" fontAlgn="base">
-                        <a:lnSpc>
-                          <a:spcPts val="1376"/>
-                        </a:lnSpc>
-                        <a:buNone/>
-                      </a:pPr>
-                      <a:r>
-                        <a:rPr lang="en-US" sz="1800" b="0">
-                          <a:effectLst/>
-                        </a:rPr>
-                        <a:t>83% </a:t>
-                      </a:r>
-                      <a:endParaRPr lang="en-US" sz="3200" b="0" i="0">
-                        <a:effectLst/>
-                      </a:endParaRPr>
-                    </a:p>
-                  </a:txBody>
-                  <a:tcPr anchor="ctr"/>
-                </a:tc>
-                <a:tc>
-                  <a:txBody>
-                    <a:bodyPr/>
-                    <a:lstStyle/>
-                    <a:p>
-                      <a:pPr algn="ctr" rtl="0" fontAlgn="base">
-                        <a:lnSpc>
-                          <a:spcPts val="1376"/>
-                        </a:lnSpc>
-                        <a:buNone/>
-                      </a:pPr>
-                      <a:r>
-                        <a:rPr lang="en-US" sz="1800" b="0" dirty="0">
-                          <a:effectLst/>
-                        </a:rPr>
-                        <a:t>33% </a:t>
+                        <a:t>0.33 </a:t>
                       </a:r>
                       <a:endParaRPr lang="en-US" sz="3200" b="0" i="0" dirty="0">
                         <a:effectLst/>
